--- a/materials/pdf/original/V3_Mealy-Automaten_Folien.pptx
+++ b/materials/pdf/original/V3_Mealy-Automaten_Folien.pptx
@@ -1963,7 +1963,7 @@
         <p:spPr>
           <a:xfrm>
             <a:off x="548640" y="6400800"/>
-            <a:ext cx="7863840" cy="274320"/>
+            <a:ext cx="10362895" cy="274320"/>
           </a:xfrm>
           <a:prstGeom prst="rect">
             <a:avLst/>
@@ -1987,7 +1987,7 @@
                 <a:ea typeface="Calibri" pitchFamily="34" charset="-122"/>
                 <a:cs typeface="Calibri" pitchFamily="34" charset="-120"/>
               </a:rPr>
-              <a:t>Video 3  ·  Mealy-Automaten  ·  automatenlab.frankjuchim.de</a:t>
+              <a:t>Video 3  ·  Mealy-Automaten  ·  automatenlab.frankjuchim.de  ·  CC BY-SA 4.0 Frank Juchim</a:t>
             </a:r>
             <a:endParaRPr lang="en-US" sz="1200" dirty="0"/>
           </a:p>
@@ -2280,7 +2280,7 @@
         <p:spPr>
           <a:xfrm>
             <a:off x="548640" y="6400800"/>
-            <a:ext cx="7863840" cy="274320"/>
+            <a:ext cx="10362895" cy="274320"/>
           </a:xfrm>
           <a:prstGeom prst="rect">
             <a:avLst/>
@@ -2304,7 +2304,7 @@
                 <a:ea typeface="Calibri" pitchFamily="34" charset="-122"/>
                 <a:cs typeface="Calibri" pitchFamily="34" charset="-120"/>
               </a:rPr>
-              <a:t>Video 3  ·  Mealy-Automaten  ·  automatenlab.frankjuchim.de</a:t>
+              <a:t>Video 3  ·  Mealy-Automaten  ·  automatenlab.frankjuchim.de  ·  CC BY-SA 4.0 Frank Juchim</a:t>
             </a:r>
             <a:endParaRPr lang="en-US" sz="1200" dirty="0"/>
           </a:p>
